--- a/勉強会/Claude_Codeの活用方法.pptx
+++ b/勉強会/Claude_Codeの活用方法.pptx
@@ -231,7 +231,7 @@
           <a:p>
             <a:fld id="{6A2464A5-CF00-2B4A-A840-72A2DCD4AF71}" type="datetimeFigureOut">
               <a:rPr kumimoji="1" lang="ja-JP" altLang="en-US" smtClean="0"/>
-              <a:t>2026/9/5</a:t>
+              <a:t>2026/9/6</a:t>
             </a:fld>
             <a:endParaRPr kumimoji="1" lang="ja-JP" altLang="en-US"/>
           </a:p>
@@ -1633,7 +1633,7 @@
           <a:p>
             <a:fld id="{5BCAD085-E8A6-8845-BD4E-CB4CCA059FC4}" type="datetimeFigureOut">
               <a:rPr lang="en-US" smtClean="0"/>
-              <a:t>9/5/26</a:t>
+              <a:t>9/6/26</a:t>
             </a:fld>
             <a:endParaRPr lang="en-US"/>
           </a:p>
@@ -1801,7 +1801,7 @@
           <a:p>
             <a:fld id="{5BCAD085-E8A6-8845-BD4E-CB4CCA059FC4}" type="datetimeFigureOut">
               <a:rPr lang="en-US" smtClean="0"/>
-              <a:t>9/5/26</a:t>
+              <a:t>9/6/26</a:t>
             </a:fld>
             <a:endParaRPr lang="en-US"/>
           </a:p>
@@ -1979,7 +1979,7 @@
           <a:p>
             <a:fld id="{5BCAD085-E8A6-8845-BD4E-CB4CCA059FC4}" type="datetimeFigureOut">
               <a:rPr lang="en-US" smtClean="0"/>
-              <a:t>9/5/26</a:t>
+              <a:t>9/6/26</a:t>
             </a:fld>
             <a:endParaRPr lang="en-US"/>
           </a:p>
@@ -2182,7 +2182,7 @@
           <a:p>
             <a:fld id="{5BCAD085-E8A6-8845-BD4E-CB4CCA059FC4}" type="datetimeFigureOut">
               <a:rPr lang="en-US" smtClean="0"/>
-              <a:t>9/5/26</a:t>
+              <a:t>9/6/26</a:t>
             </a:fld>
             <a:endParaRPr lang="en-US"/>
           </a:p>
@@ -2427,7 +2427,7 @@
           <a:p>
             <a:fld id="{5BCAD085-E8A6-8845-BD4E-CB4CCA059FC4}" type="datetimeFigureOut">
               <a:rPr lang="en-US" smtClean="0"/>
-              <a:t>9/5/26</a:t>
+              <a:t>9/6/26</a:t>
             </a:fld>
             <a:endParaRPr lang="en-US"/>
           </a:p>
@@ -2712,7 +2712,7 @@
           <a:p>
             <a:fld id="{5BCAD085-E8A6-8845-BD4E-CB4CCA059FC4}" type="datetimeFigureOut">
               <a:rPr lang="en-US" smtClean="0"/>
-              <a:t>9/5/26</a:t>
+              <a:t>9/6/26</a:t>
             </a:fld>
             <a:endParaRPr lang="en-US"/>
           </a:p>
@@ -3131,7 +3131,7 @@
           <a:p>
             <a:fld id="{5BCAD085-E8A6-8845-BD4E-CB4CCA059FC4}" type="datetimeFigureOut">
               <a:rPr lang="en-US" smtClean="0"/>
-              <a:t>9/5/26</a:t>
+              <a:t>9/6/26</a:t>
             </a:fld>
             <a:endParaRPr lang="en-US"/>
           </a:p>
@@ -3248,7 +3248,7 @@
           <a:p>
             <a:fld id="{5BCAD085-E8A6-8845-BD4E-CB4CCA059FC4}" type="datetimeFigureOut">
               <a:rPr lang="en-US" smtClean="0"/>
-              <a:t>9/5/26</a:t>
+              <a:t>9/6/26</a:t>
             </a:fld>
             <a:endParaRPr lang="en-US"/>
           </a:p>
@@ -3343,7 +3343,7 @@
           <a:p>
             <a:fld id="{5BCAD085-E8A6-8845-BD4E-CB4CCA059FC4}" type="datetimeFigureOut">
               <a:rPr lang="en-US" smtClean="0"/>
-              <a:t>9/5/26</a:t>
+              <a:t>9/6/26</a:t>
             </a:fld>
             <a:endParaRPr lang="en-US"/>
           </a:p>
@@ -3618,7 +3618,7 @@
           <a:p>
             <a:fld id="{5BCAD085-E8A6-8845-BD4E-CB4CCA059FC4}" type="datetimeFigureOut">
               <a:rPr lang="en-US" smtClean="0"/>
-              <a:t>9/5/26</a:t>
+              <a:t>9/6/26</a:t>
             </a:fld>
             <a:endParaRPr lang="en-US"/>
           </a:p>
@@ -3870,7 +3870,7 @@
           <a:p>
             <a:fld id="{5BCAD085-E8A6-8845-BD4E-CB4CCA059FC4}" type="datetimeFigureOut">
               <a:rPr lang="en-US" smtClean="0"/>
-              <a:t>9/5/26</a:t>
+              <a:t>9/6/26</a:t>
             </a:fld>
             <a:endParaRPr lang="en-US"/>
           </a:p>
@@ -4081,7 +4081,7 @@
           <a:p>
             <a:fld id="{5BCAD085-E8A6-8845-BD4E-CB4CCA059FC4}" type="datetimeFigureOut">
               <a:rPr lang="en-US" smtClean="0"/>
-              <a:t>9/5/26</a:t>
+              <a:t>9/6/26</a:t>
             </a:fld>
             <a:endParaRPr lang="en-US"/>
           </a:p>
